--- a/Unidad 4/Actividad 4.2 Reporte de Practica_CynthiaMorales_6ISCM.pptx
+++ b/Unidad 4/Actividad 4.2 Reporte de Practica_CynthiaMorales_6ISCM.pptx
@@ -112,6 +112,11 @@
       </a:defRPr>
     </a:lvl9pPr>
   </p:defaultTextStyle>
+  <p:extLst>
+    <p:ext uri="{EFAFB233-063F-42B5-8137-9DF3F51BA10A}">
+      <p15:sldGuideLst xmlns:p15="http://schemas.microsoft.com/office/powerpoint/2012/main"/>
+    </p:ext>
+  </p:extLst>
 </p:presentation>
 </file>
 
@@ -3742,7 +3747,31 @@
                 <a:cs typeface="Glacial Indifference"/>
                 <a:sym typeface="Glacial Indifference"/>
               </a:rPr>
-              <a:t> Frontera Comalapa, Chiapas. A 24 de Mayo del 2026</a:t>
+              <a:t> Frontera Comalapa, Chiapas. </a:t>
+            </a:r>
+            <a:r>
+              <a:rPr lang="en-US" sz="1600">
+                <a:solidFill>
+                  <a:srgbClr val="000000"/>
+                </a:solidFill>
+                <a:latin typeface="Century Gothic" panose="020B0502020202020204" pitchFamily="34" charset="0"/>
+                <a:ea typeface="Glacial Indifference"/>
+                <a:cs typeface="Glacial Indifference"/>
+                <a:sym typeface="Glacial Indifference"/>
+              </a:rPr>
+              <a:t>A 29 </a:t>
+            </a:r>
+            <a:r>
+              <a:rPr lang="en-US" sz="1600" dirty="0">
+                <a:solidFill>
+                  <a:srgbClr val="000000"/>
+                </a:solidFill>
+                <a:latin typeface="Century Gothic" panose="020B0502020202020204" pitchFamily="34" charset="0"/>
+                <a:ea typeface="Glacial Indifference"/>
+                <a:cs typeface="Glacial Indifference"/>
+                <a:sym typeface="Glacial Indifference"/>
+              </a:rPr>
+              <a:t>de Mayo del 2026</a:t>
             </a:r>
           </a:p>
         </p:txBody>
